--- a/deliverables/Walkthrough_Deck.pptx
+++ b/deliverables/Walkthrough_Deck.pptx
@@ -1109,12 +1109,22 @@
           <a:p/>
           <a:p>
             <a:r>
-              <a:t>The 1,200 one is worth naming specifically: 55 payments on that account, and a</a:t>
-            </a:r>
-          </a:p>
-          <a:p>
-            <a:r>
-              <a:t>gap of exactly 1,200.00. That is not rounding, that is a posting.</a:t>
+              <a:t>Worth telling against ourselves: this slide used to say 55 accounts, one of</a:t>
+            </a:r>
+          </a:p>
+          <a:p>
+            <a:r>
+              <a:t>them out by exactly 1,200.00. Forty-one of those, the 1,200 included, were our</a:t>
+            </a:r>
+          </a:p>
+          <a:p>
+            <a:r>
+              <a:t>own tie-break picking the wrong closing posting on a day with several. The</a:t>
+            </a:r>
+          </a:p>
+          <a:p>
+            <a:r>
+              <a:t>running balance says which posting closed the day; using it (D028) left 14.</a:t>
             </a:r>
           </a:p>
         </p:txBody>
@@ -5425,7 +5435,7 @@
           </a:p>
           <a:p>
             <a:r>
-              <a:t>has to be willing to read a caveat. The 55 accounts whose balance chain does</a:t>
+              <a:t>has to be willing to read a caveat. The 14 accounts whose balance chain does</a:t>
             </a:r>
           </a:p>
           <a:p>
@@ -10662,7 +10672,7 @@
                 </a:solidFill>
                 <a:latin typeface="Calibri"/>
               </a:rPr>
-              <a:t>Testing order-independently: 3,869 of 4,500 accounts differ between the sum of their payments and their last stated balance. Most is rounding — every amount carries one decimal. But 55 accounts are out by more than 100, and one by exactly 1,200 with only 55 payments. That is a missing or duplicated posting, not rounding.</a:t>
+              <a:t>Testing order-independently: 3,863 of 4,500 accounts differ between the sum of their payments and their last stated balance. Most is rounding — every amount carries one decimal. But 14 accounts are out by more than 100, the largest by 488.30. That is a missing or duplicated posting, not rounding.</a:t>
             </a:r>
           </a:p>
         </p:txBody>
@@ -10788,7 +10798,7 @@
                 </a:solidFill>
                 <a:latin typeface="Calibri"/>
               </a:rPr>
-              <a:t>Payment IDs are not in time order within a day. For 183 accounts that uncertainty lands on their very last active day — so "the closing balance" is a documented choice we made, not a fact the data contains. That is exactly what Q9 asks for.</a:t>
+              <a:t>Payment IDs are not in time order within a day. For 183 accounts that lands on their very last active day. The running balance orders 141 of them; 42 stay ambiguous and are marked as such. That is exactly what Q9 asks for.</a:t>
             </a:r>
           </a:p>
         </p:txBody>
@@ -12140,7 +12150,7 @@
                 </a:solidFill>
                 <a:latin typeface="Calibri"/>
               </a:rPr>
-              <a:t>43,808.94 over 4,500 accounts  (+ 2 caveats attached)</a:t>
+              <a:t>43,810.47 over 4,500 accounts  (+ 2 caveats attached)</a:t>
             </a:r>
           </a:p>
         </p:txBody>
@@ -37326,7 +37336,7 @@
                 </a:solidFill>
                 <a:latin typeface="Calibri"/>
               </a:rPr>
-              <a:t>55 accounts whose balance chain does not reconcile; intra-day order undefined for 183 accounts; one duplicate payment no primary key can catch.</a:t>
+              <a:t>14 accounts whose balance chain does not reconcile; intra-day order unrecorded for 183 accounts; one duplicate payment no primary key can catch.</a:t>
             </a:r>
           </a:p>
         </p:txBody>
@@ -48304,7 +48314,7 @@
                 </a:solidFill>
                 <a:latin typeface="Calibri"/>
               </a:rPr>
-              <a:t>183 accounts have an ambiguous last posting of the day. No derived table can resolve what the source did not record; it can only state the tie-break.</a:t>
+              <a:t>183 accounts have several postings on their last day. The running balance orders 141; for 42 no derived table can resolve what the source did not record.</a:t>
             </a:r>
           </a:p>
         </p:txBody>
